--- a/documentation/E_modulus_explained.pptx
+++ b/documentation/E_modulus_explained.pptx
@@ -7,6 +7,7 @@
   <p:sldIdLst>
     <p:sldId id="256" r:id="rId7"/>
     <p:sldId id="257" r:id="rId8"/>
+    <p:sldId id="258" r:id="rId9"/>
   </p:sldIdLst>
   <p:sldSz cx="12191695" cy="6858000" type="screen4x3"/>
   <p:notesSz cx="6858000" cy="9144000"/>
@@ -4308,6 +4309,518 @@
                 <a:latin typeface="Calibri"/>
               </a:rPr>
               <a:t>2</a:t>
+            </a:r>
+          </a:p>
+        </p:txBody>
+      </p:sp>
+    </p:spTree>
+  </p:cSld>
+  <p:clrMapOvr>
+    <a:masterClrMapping/>
+  </p:clrMapOvr>
+</p:sld>
+</file>
+
+<file path=ppt/slides/slide3.xml><?xml version="1.0" encoding="utf-8"?>
+<p:sld xmlns:a="http://schemas.openxmlformats.org/drawingml/2006/main" xmlns:p="http://schemas.openxmlformats.org/presentationml/2006/main" xmlns:r="http://schemas.openxmlformats.org/officeDocument/2006/relationships">
+  <p:cSld>
+    <p:spTree>
+      <p:nvGrpSpPr>
+        <p:cNvPr id="1" name=""/>
+        <p:cNvGrpSpPr/>
+        <p:nvPr/>
+      </p:nvGrpSpPr>
+      <p:grpSpPr/>
+      <p:sp>
+        <p:nvSpPr>
+          <p:cNvPr id="2" name="TextBox 1"/>
+          <p:cNvSpPr txBox="1"/>
+          <p:nvPr/>
+        </p:nvSpPr>
+        <p:spPr>
+          <a:xfrm>
+            <a:off x="11155680" y="274320"/>
+            <a:ext cx="914400" cy="274320"/>
+          </a:xfrm>
+          <a:prstGeom prst="rect">
+            <a:avLst/>
+          </a:prstGeom>
+          <a:noFill/>
+        </p:spPr>
+        <p:txBody>
+          <a:bodyPr wrap="square" lIns="45720" rIns="45720" tIns="18288" bIns="18288" anchor="t">
+            <a:spAutoFit/>
+          </a:bodyPr>
+          <a:lstStyle/>
+          <a:p>
+            <a:pPr algn="r"/>
+            <a:r>
+              <a:rPr sz="800" b="1" i="0">
+                <a:solidFill>
+                  <a:srgbClr val="707070"/>
+                </a:solidFill>
+                <a:latin typeface="Calibri"/>
+              </a:rPr>
+              <a:t>JÖNKÖPING UNIVERSITY</a:t>
+            </a:r>
+          </a:p>
+        </p:txBody>
+      </p:sp>
+      <p:sp>
+        <p:nvSpPr>
+          <p:cNvPr id="3" name="Rectangle 2"/>
+          <p:cNvSpPr/>
+          <p:nvPr/>
+        </p:nvSpPr>
+        <p:spPr>
+          <a:xfrm>
+            <a:off x="457200" y="411480"/>
+            <a:ext cx="457200" cy="73152"/>
+          </a:xfrm>
+          <a:prstGeom prst="rect">
+            <a:avLst/>
+          </a:prstGeom>
+          <a:solidFill>
+            <a:srgbClr val="A9D6EF"/>
+          </a:solidFill>
+          <a:ln>
+            <a:noFill/>
+          </a:ln>
+        </p:spPr>
+        <p:style>
+          <a:lnRef idx="1">
+            <a:schemeClr val="accent1"/>
+          </a:lnRef>
+          <a:fillRef idx="3">
+            <a:schemeClr val="accent1"/>
+          </a:fillRef>
+          <a:effectRef idx="2">
+            <a:schemeClr val="accent1"/>
+          </a:effectRef>
+          <a:fontRef idx="minor">
+            <a:schemeClr val="lt1"/>
+          </a:fontRef>
+        </p:style>
+        <p:txBody>
+          <a:bodyPr rtlCol="0" anchor="ctr"/>
+          <a:lstStyle/>
+          <a:p>
+            <a:pPr algn="ctr"/>
+          </a:p>
+        </p:txBody>
+      </p:sp>
+      <p:sp>
+        <p:nvSpPr>
+          <p:cNvPr id="4" name="TextBox 3"/>
+          <p:cNvSpPr txBox="1"/>
+          <p:nvPr/>
+        </p:nvSpPr>
+        <p:spPr>
+          <a:xfrm>
+            <a:off x="457200" y="502920"/>
+            <a:ext cx="11430000" cy="822960"/>
+          </a:xfrm>
+          <a:prstGeom prst="rect">
+            <a:avLst/>
+          </a:prstGeom>
+          <a:noFill/>
+        </p:spPr>
+        <p:txBody>
+          <a:bodyPr wrap="square" lIns="45720" rIns="45720" tIns="18288" bIns="18288" anchor="t">
+            <a:spAutoFit/>
+          </a:bodyPr>
+          <a:lstStyle/>
+          <a:p>
+            <a:pPr algn="l"/>
+            <a:r>
+              <a:rPr sz="3000" b="0" i="0">
+                <a:solidFill>
+                  <a:srgbClr val="000000"/>
+                </a:solidFill>
+                <a:latin typeface="Calibri Light"/>
+              </a:rPr>
+              <a:t>The two grey lines on the report's stress–strain graph</a:t>
+            </a:r>
+          </a:p>
+        </p:txBody>
+      </p:sp>
+      <p:sp>
+        <p:nvSpPr>
+          <p:cNvPr id="5" name="TextBox 4"/>
+          <p:cNvSpPr txBox="1"/>
+          <p:nvPr/>
+        </p:nvSpPr>
+        <p:spPr>
+          <a:xfrm>
+            <a:off x="457200" y="1207008"/>
+            <a:ext cx="11338560" cy="365760"/>
+          </a:xfrm>
+          <a:prstGeom prst="rect">
+            <a:avLst/>
+          </a:prstGeom>
+          <a:noFill/>
+        </p:spPr>
+        <p:txBody>
+          <a:bodyPr wrap="square" lIns="45720" rIns="45720" tIns="18288" bIns="18288" anchor="t">
+            <a:spAutoFit/>
+          </a:bodyPr>
+          <a:lstStyle/>
+          <a:p>
+            <a:pPr algn="l"/>
+            <a:r>
+              <a:rPr sz="1600" b="0" i="0">
+                <a:solidFill>
+                  <a:srgbClr val="707070"/>
+                </a:solidFill>
+                <a:latin typeface="Calibri"/>
+              </a:rPr>
+              <a:t>Both have the SAME slope — the one E you measured. Neither of them is used to compute E.</a:t>
+            </a:r>
+          </a:p>
+        </p:txBody>
+      </p:sp>
+      <p:pic>
+        <p:nvPicPr>
+          <p:cNvPr id="6" name="Picture 5" descr="e_fig_two_lines.png"/>
+          <p:cNvPicPr>
+            <a:picLocks noChangeAspect="1"/>
+          </p:cNvPicPr>
+          <p:nvPr/>
+        </p:nvPicPr>
+        <p:blipFill>
+          <a:blip r:embed="rId2"/>
+          <a:stretch>
+            <a:fillRect/>
+          </a:stretch>
+        </p:blipFill>
+        <p:spPr>
+          <a:xfrm>
+            <a:off x="1340365" y="1572768"/>
+            <a:ext cx="9480788" cy="4023359"/>
+          </a:xfrm>
+          <a:prstGeom prst="rect">
+            <a:avLst/>
+          </a:prstGeom>
+        </p:spPr>
+      </p:pic>
+      <p:sp>
+        <p:nvSpPr>
+          <p:cNvPr id="7" name="Rounded Rectangle 6"/>
+          <p:cNvSpPr/>
+          <p:nvPr/>
+        </p:nvSpPr>
+        <p:spPr>
+          <a:xfrm>
+            <a:off x="502920" y="5687568"/>
+            <a:ext cx="2688336" cy="566928"/>
+          </a:xfrm>
+          <a:prstGeom prst="roundRect">
+            <a:avLst/>
+          </a:prstGeom>
+          <a:solidFill>
+            <a:srgbClr val="FFFFFF"/>
+          </a:solidFill>
+          <a:ln w="20320">
+            <a:solidFill>
+              <a:srgbClr val="D62728"/>
+            </a:solidFill>
+          </a:ln>
+        </p:spPr>
+        <p:style>
+          <a:lnRef idx="1">
+            <a:schemeClr val="accent1"/>
+          </a:lnRef>
+          <a:fillRef idx="3">
+            <a:schemeClr val="accent1"/>
+          </a:fillRef>
+          <a:effectRef idx="2">
+            <a:schemeClr val="accent1"/>
+          </a:effectRef>
+          <a:fontRef idx="minor">
+            <a:schemeClr val="lt1"/>
+          </a:fontRef>
+        </p:style>
+        <p:txBody>
+          <a:bodyPr rtlCol="0" anchor="ctr" wrap="square" lIns="73152" rIns="73152" tIns="27432" bIns="27432"/>
+          <a:lstStyle/>
+          <a:p>
+            <a:pPr algn="l"/>
+            <a:r>
+              <a:rPr sz="1500" b="1">
+                <a:solidFill>
+                  <a:srgbClr val="D62728"/>
+                </a:solidFill>
+                <a:latin typeface="Calibri"/>
+              </a:rPr>
+              <a:t>1   </a:t>
+            </a:r>
+            <a:r>
+              <a:rPr sz="1100">
+                <a:solidFill>
+                  <a:srgbClr val="000000"/>
+                </a:solidFill>
+                <a:latin typeface="Calibri"/>
+              </a:rPr>
+              <a:t>Fit E first — least squares over the points from 0.05 % to 0.40 % strain.</a:t>
+            </a:r>
+          </a:p>
+        </p:txBody>
+      </p:sp>
+      <p:sp>
+        <p:nvSpPr>
+          <p:cNvPr id="8" name="Rounded Rectangle 7"/>
+          <p:cNvSpPr/>
+          <p:nvPr/>
+        </p:nvSpPr>
+        <p:spPr>
+          <a:xfrm>
+            <a:off x="3355848" y="5687568"/>
+            <a:ext cx="2688336" cy="566928"/>
+          </a:xfrm>
+          <a:prstGeom prst="roundRect">
+            <a:avLst/>
+          </a:prstGeom>
+          <a:solidFill>
+            <a:srgbClr val="FFFFFF"/>
+          </a:solidFill>
+          <a:ln w="20320">
+            <a:solidFill>
+              <a:srgbClr val="333333"/>
+            </a:solidFill>
+          </a:ln>
+        </p:spPr>
+        <p:style>
+          <a:lnRef idx="1">
+            <a:schemeClr val="accent1"/>
+          </a:lnRef>
+          <a:fillRef idx="3">
+            <a:schemeClr val="accent1"/>
+          </a:fillRef>
+          <a:effectRef idx="2">
+            <a:schemeClr val="accent1"/>
+          </a:effectRef>
+          <a:fontRef idx="minor">
+            <a:schemeClr val="lt1"/>
+          </a:fontRef>
+        </p:style>
+        <p:txBody>
+          <a:bodyPr rtlCol="0" anchor="ctr" wrap="square" lIns="73152" rIns="73152" tIns="27432" bIns="27432"/>
+          <a:lstStyle/>
+          <a:p>
+            <a:pPr algn="l"/>
+            <a:r>
+              <a:rPr sz="1500" b="1">
+                <a:solidFill>
+                  <a:srgbClr val="333333"/>
+                </a:solidFill>
+                <a:latin typeface="Calibri"/>
+              </a:rPr>
+              <a:t>2   </a:t>
+            </a:r>
+            <a:r>
+              <a:rPr sz="1100">
+                <a:solidFill>
+                  <a:srgbClr val="000000"/>
+                </a:solidFill>
+                <a:latin typeface="Calibri"/>
+              </a:rPr>
+              <a:t>Draw ① with that slope: the short dashed line that hugs the start of the curve.</a:t>
+            </a:r>
+          </a:p>
+        </p:txBody>
+      </p:sp>
+      <p:sp>
+        <p:nvSpPr>
+          <p:cNvPr id="9" name="Rounded Rectangle 8"/>
+          <p:cNvSpPr/>
+          <p:nvPr/>
+        </p:nvSpPr>
+        <p:spPr>
+          <a:xfrm>
+            <a:off x="6208776" y="5687568"/>
+            <a:ext cx="2688336" cy="566928"/>
+          </a:xfrm>
+          <a:prstGeom prst="roundRect">
+            <a:avLst/>
+          </a:prstGeom>
+          <a:solidFill>
+            <a:srgbClr val="FFFFFF"/>
+          </a:solidFill>
+          <a:ln w="20320">
+            <a:solidFill>
+              <a:srgbClr val="B03060"/>
+            </a:solidFill>
+          </a:ln>
+        </p:spPr>
+        <p:style>
+          <a:lnRef idx="1">
+            <a:schemeClr val="accent1"/>
+          </a:lnRef>
+          <a:fillRef idx="3">
+            <a:schemeClr val="accent1"/>
+          </a:fillRef>
+          <a:effectRef idx="2">
+            <a:schemeClr val="accent1"/>
+          </a:effectRef>
+          <a:fontRef idx="minor">
+            <a:schemeClr val="lt1"/>
+          </a:fontRef>
+        </p:style>
+        <p:txBody>
+          <a:bodyPr rtlCol="0" anchor="ctr" wrap="square" lIns="73152" rIns="73152" tIns="27432" bIns="27432"/>
+          <a:lstStyle/>
+          <a:p>
+            <a:pPr algn="l"/>
+            <a:r>
+              <a:rPr sz="1500" b="1">
+                <a:solidFill>
+                  <a:srgbClr val="B03060"/>
+                </a:solidFill>
+                <a:latin typeface="Calibri"/>
+              </a:rPr>
+              <a:t>3   </a:t>
+            </a:r>
+            <a:r>
+              <a:rPr sz="1100">
+                <a:solidFill>
+                  <a:srgbClr val="000000"/>
+                </a:solidFill>
+                <a:latin typeface="Calibri"/>
+              </a:rPr>
+              <a:t>Copy it and slide it 0.2 % to the right — that copy is ②, the long dotted line.</a:t>
+            </a:r>
+          </a:p>
+        </p:txBody>
+      </p:sp>
+      <p:sp>
+        <p:nvSpPr>
+          <p:cNvPr id="10" name="Rounded Rectangle 9"/>
+          <p:cNvSpPr/>
+          <p:nvPr/>
+        </p:nvSpPr>
+        <p:spPr>
+          <a:xfrm>
+            <a:off x="9061704" y="5687568"/>
+            <a:ext cx="2688336" cy="566928"/>
+          </a:xfrm>
+          <a:prstGeom prst="roundRect">
+            <a:avLst/>
+          </a:prstGeom>
+          <a:solidFill>
+            <a:srgbClr val="FFFFFF"/>
+          </a:solidFill>
+          <a:ln w="20320">
+            <a:solidFill>
+              <a:srgbClr val="2A9D5C"/>
+            </a:solidFill>
+          </a:ln>
+        </p:spPr>
+        <p:style>
+          <a:lnRef idx="1">
+            <a:schemeClr val="accent1"/>
+          </a:lnRef>
+          <a:fillRef idx="3">
+            <a:schemeClr val="accent1"/>
+          </a:fillRef>
+          <a:effectRef idx="2">
+            <a:schemeClr val="accent1"/>
+          </a:effectRef>
+          <a:fontRef idx="minor">
+            <a:schemeClr val="lt1"/>
+          </a:fontRef>
+        </p:style>
+        <p:txBody>
+          <a:bodyPr rtlCol="0" anchor="ctr" wrap="square" lIns="73152" rIns="73152" tIns="27432" bIns="27432"/>
+          <a:lstStyle/>
+          <a:p>
+            <a:pPr algn="l"/>
+            <a:r>
+              <a:rPr sz="1500" b="1">
+                <a:solidFill>
+                  <a:srgbClr val="2A9D5C"/>
+                </a:solidFill>
+                <a:latin typeface="Calibri"/>
+              </a:rPr>
+              <a:t>4   </a:t>
+            </a:r>
+            <a:r>
+              <a:rPr sz="1100">
+                <a:solidFill>
+                  <a:srgbClr val="000000"/>
+                </a:solidFill>
+                <a:latin typeface="Calibri"/>
+              </a:rPr>
+              <a:t>Where ② meets the curve is σ_y, the 0.2 % offset yield stress.</a:t>
+            </a:r>
+          </a:p>
+        </p:txBody>
+      </p:sp>
+      <p:sp>
+        <p:nvSpPr>
+          <p:cNvPr id="11" name="TextBox 10"/>
+          <p:cNvSpPr txBox="1"/>
+          <p:nvPr/>
+        </p:nvSpPr>
+        <p:spPr>
+          <a:xfrm>
+            <a:off x="548640" y="6400800"/>
+            <a:ext cx="10744200" cy="365760"/>
+          </a:xfrm>
+          <a:prstGeom prst="rect">
+            <a:avLst/>
+          </a:prstGeom>
+          <a:noFill/>
+        </p:spPr>
+        <p:txBody>
+          <a:bodyPr wrap="square" lIns="45720" rIns="45720" tIns="18288" bIns="18288" anchor="t">
+            <a:spAutoFit/>
+          </a:bodyPr>
+          <a:lstStyle/>
+          <a:p>
+            <a:pPr algn="l"/>
+            <a:r>
+              <a:rPr sz="1200" b="0" i="1">
+                <a:solidFill>
+                  <a:srgbClr val="707070"/>
+                </a:solidFill>
+                <a:latin typeface="Calibri"/>
+              </a:rPr>
+              <a:t>The line is not an extrapolation FROM the yield point — the yield point is defined BY the line. S16 · E 1.88 GPa · σ_y 47.0 MPa</a:t>
+            </a:r>
+          </a:p>
+        </p:txBody>
+      </p:sp>
+      <p:sp>
+        <p:nvSpPr>
+          <p:cNvPr id="12" name="TextBox 11"/>
+          <p:cNvSpPr txBox="1"/>
+          <p:nvPr/>
+        </p:nvSpPr>
+        <p:spPr>
+          <a:xfrm>
+            <a:off x="11384280" y="6446520"/>
+            <a:ext cx="548640" cy="274320"/>
+          </a:xfrm>
+          <a:prstGeom prst="rect">
+            <a:avLst/>
+          </a:prstGeom>
+          <a:noFill/>
+        </p:spPr>
+        <p:txBody>
+          <a:bodyPr wrap="square" lIns="45720" rIns="45720" tIns="18288" bIns="18288" anchor="t">
+            <a:spAutoFit/>
+          </a:bodyPr>
+          <a:lstStyle/>
+          <a:p>
+            <a:pPr algn="r"/>
+            <a:r>
+              <a:rPr sz="1000" b="0" i="0">
+                <a:solidFill>
+                  <a:srgbClr val="707070"/>
+                </a:solidFill>
+                <a:latin typeface="Calibri"/>
+              </a:rPr>
+              <a:t>3</a:t>
             </a:r>
           </a:p>
         </p:txBody>

--- a/documentation/E_modulus_explained.pptx
+++ b/documentation/E_modulus_explained.pptx
@@ -8,6 +8,8 @@
     <p:sldId id="256" r:id="rId7"/>
     <p:sldId id="257" r:id="rId8"/>
     <p:sldId id="258" r:id="rId9"/>
+    <p:sldId id="259" r:id="rId10"/>
+    <p:sldId id="260" r:id="rId11"/>
   </p:sldIdLst>
   <p:sldSz cx="12191695" cy="6858000" type="screen4x3"/>
   <p:notesSz cx="6858000" cy="9144000"/>
@@ -3198,7 +3200,7 @@
                 </a:solidFill>
                 <a:latin typeface="Calibri Light"/>
               </a:rPr>
-              <a:t>Young's modulus  E  —  how stiff is the material?</a:t>
+              <a:t>Young's modulus  E  —  the slope of the ELASTIC region</a:t>
             </a:r>
           </a:p>
         </p:txBody>
@@ -3233,7 +3235,7 @@
                 </a:solidFill>
                 <a:latin typeface="Calibri"/>
               </a:rPr>
-              <a:t>Pull the specimen. It stretches. E is how steeply the pull has to rise to keep it stretching.</a:t>
+              <a:t>Elastic = the specimen would spring back if you let go. E is the slope of the graph there, and nowhere else.</a:t>
             </a:r>
           </a:p>
         </p:txBody>
@@ -3386,7 +3388,7 @@
                 </a:solidFill>
                 <a:latin typeface="Calibri"/>
               </a:rPr>
-              <a:t>= how much the STRESS went up, divided by how much it STRETCHED to get there.</a:t>
+              <a:t>= the SLOPE of the elastic region: how much the STRESS went up, divided by how much it STRETCHED to get there.</a:t>
             </a:r>
           </a:p>
         </p:txBody>
@@ -3563,7 +3565,7 @@
                 </a:solidFill>
                 <a:latin typeface="Calibri"/>
               </a:rPr>
-              <a:t>Steepness of the straight bit = stiffness.  Nothing else on the curve is used for E.</a:t>
+              <a:t>Slope of the ELASTIC region = stiffness.  Nothing past the elastic region is used for E.</a:t>
             </a:r>
           </a:p>
         </p:txBody>
@@ -4821,6 +4823,1056 @@
                 <a:latin typeface="Calibri"/>
               </a:rPr>
               <a:t>3</a:t>
+            </a:r>
+          </a:p>
+        </p:txBody>
+      </p:sp>
+    </p:spTree>
+  </p:cSld>
+  <p:clrMapOvr>
+    <a:masterClrMapping/>
+  </p:clrMapOvr>
+</p:sld>
+</file>
+
+<file path=ppt/slides/slide4.xml><?xml version="1.0" encoding="utf-8"?>
+<p:sld xmlns:a="http://schemas.openxmlformats.org/drawingml/2006/main" xmlns:p="http://schemas.openxmlformats.org/presentationml/2006/main" xmlns:r="http://schemas.openxmlformats.org/officeDocument/2006/relationships">
+  <p:cSld>
+    <p:spTree>
+      <p:nvGrpSpPr>
+        <p:cNvPr id="1" name=""/>
+        <p:cNvGrpSpPr/>
+        <p:nvPr/>
+      </p:nvGrpSpPr>
+      <p:grpSpPr/>
+      <p:sp>
+        <p:nvSpPr>
+          <p:cNvPr id="2" name="TextBox 1"/>
+          <p:cNvSpPr txBox="1"/>
+          <p:nvPr/>
+        </p:nvSpPr>
+        <p:spPr>
+          <a:xfrm>
+            <a:off x="11155680" y="274320"/>
+            <a:ext cx="914400" cy="274320"/>
+          </a:xfrm>
+          <a:prstGeom prst="rect">
+            <a:avLst/>
+          </a:prstGeom>
+          <a:noFill/>
+        </p:spPr>
+        <p:txBody>
+          <a:bodyPr wrap="square" lIns="45720" rIns="45720" tIns="18288" bIns="18288" anchor="t">
+            <a:spAutoFit/>
+          </a:bodyPr>
+          <a:lstStyle/>
+          <a:p>
+            <a:pPr algn="r"/>
+            <a:r>
+              <a:rPr sz="800" b="1" i="0">
+                <a:solidFill>
+                  <a:srgbClr val="707070"/>
+                </a:solidFill>
+                <a:latin typeface="Calibri"/>
+              </a:rPr>
+              <a:t>JÖNKÖPING UNIVERSITY</a:t>
+            </a:r>
+          </a:p>
+        </p:txBody>
+      </p:sp>
+      <p:sp>
+        <p:nvSpPr>
+          <p:cNvPr id="3" name="Rectangle 2"/>
+          <p:cNvSpPr/>
+          <p:nvPr/>
+        </p:nvSpPr>
+        <p:spPr>
+          <a:xfrm>
+            <a:off x="457200" y="411480"/>
+            <a:ext cx="457200" cy="73152"/>
+          </a:xfrm>
+          <a:prstGeom prst="rect">
+            <a:avLst/>
+          </a:prstGeom>
+          <a:solidFill>
+            <a:srgbClr val="A9D6EF"/>
+          </a:solidFill>
+          <a:ln>
+            <a:noFill/>
+          </a:ln>
+        </p:spPr>
+        <p:style>
+          <a:lnRef idx="1">
+            <a:schemeClr val="accent1"/>
+          </a:lnRef>
+          <a:fillRef idx="3">
+            <a:schemeClr val="accent1"/>
+          </a:fillRef>
+          <a:effectRef idx="2">
+            <a:schemeClr val="accent1"/>
+          </a:effectRef>
+          <a:fontRef idx="minor">
+            <a:schemeClr val="lt1"/>
+          </a:fontRef>
+        </p:style>
+        <p:txBody>
+          <a:bodyPr rtlCol="0" anchor="ctr"/>
+          <a:lstStyle/>
+          <a:p>
+            <a:pPr algn="ctr"/>
+          </a:p>
+        </p:txBody>
+      </p:sp>
+      <p:sp>
+        <p:nvSpPr>
+          <p:cNvPr id="4" name="TextBox 3"/>
+          <p:cNvSpPr txBox="1"/>
+          <p:nvPr/>
+        </p:nvSpPr>
+        <p:spPr>
+          <a:xfrm>
+            <a:off x="457200" y="502920"/>
+            <a:ext cx="11430000" cy="822960"/>
+          </a:xfrm>
+          <a:prstGeom prst="rect">
+            <a:avLst/>
+          </a:prstGeom>
+          <a:noFill/>
+        </p:spPr>
+        <p:txBody>
+          <a:bodyPr wrap="square" lIns="45720" rIns="45720" tIns="18288" bIns="18288" anchor="t">
+            <a:spAutoFit/>
+          </a:bodyPr>
+          <a:lstStyle/>
+          <a:p>
+            <a:pPr algn="l"/>
+            <a:r>
+              <a:rPr sz="3000" b="0" i="0">
+                <a:solidFill>
+                  <a:srgbClr val="000000"/>
+                </a:solidFill>
+                <a:latin typeface="Calibri Light"/>
+              </a:rPr>
+              <a:t>Why line ② is needed:  PLA has no obvious yield point</a:t>
+            </a:r>
+          </a:p>
+        </p:txBody>
+      </p:sp>
+      <p:sp>
+        <p:nvSpPr>
+          <p:cNvPr id="5" name="TextBox 4"/>
+          <p:cNvSpPr txBox="1"/>
+          <p:nvPr/>
+        </p:nvSpPr>
+        <p:spPr>
+          <a:xfrm>
+            <a:off x="457200" y="1207008"/>
+            <a:ext cx="11338560" cy="365760"/>
+          </a:xfrm>
+          <a:prstGeom prst="rect">
+            <a:avLst/>
+          </a:prstGeom>
+          <a:noFill/>
+        </p:spPr>
+        <p:txBody>
+          <a:bodyPr wrap="square" lIns="45720" rIns="45720" tIns="18288" bIns="18288" anchor="t">
+            <a:spAutoFit/>
+          </a:bodyPr>
+          <a:lstStyle/>
+          <a:p>
+            <a:pPr algn="l"/>
+            <a:r>
+              <a:rPr sz="1600" b="0" i="0">
+                <a:solidFill>
+                  <a:srgbClr val="707070"/>
+                </a:solidFill>
+                <a:latin typeface="Calibri"/>
+              </a:rPr>
+              <a:t>Steel snaps to a clear yield. PLA just bends over gradually — so "where did it yield" has to be DEFINED, not read off.</a:t>
+            </a:r>
+          </a:p>
+        </p:txBody>
+      </p:sp>
+      <p:pic>
+        <p:nvPicPr>
+          <p:cNvPr id="6" name="Picture 5" descr="e_fig_permanent.png"/>
+          <p:cNvPicPr>
+            <a:picLocks noChangeAspect="1"/>
+          </p:cNvPicPr>
+          <p:nvPr/>
+        </p:nvPicPr>
+        <p:blipFill>
+          <a:blip r:embed="rId2"/>
+          <a:stretch>
+            <a:fillRect/>
+          </a:stretch>
+        </p:blipFill>
+        <p:spPr>
+          <a:xfrm>
+            <a:off x="538581" y="1627632"/>
+            <a:ext cx="6466636" cy="4041648"/>
+          </a:xfrm>
+          <a:prstGeom prst="rect">
+            <a:avLst/>
+          </a:prstGeom>
+        </p:spPr>
+      </p:pic>
+      <p:sp>
+        <p:nvSpPr>
+          <p:cNvPr id="7" name="TextBox 6"/>
+          <p:cNvSpPr txBox="1"/>
+          <p:nvPr/>
+        </p:nvSpPr>
+        <p:spPr>
+          <a:xfrm>
+            <a:off x="7452360" y="1645920"/>
+            <a:ext cx="4343400" cy="685800"/>
+          </a:xfrm>
+          <a:prstGeom prst="rect">
+            <a:avLst/>
+          </a:prstGeom>
+          <a:noFill/>
+        </p:spPr>
+        <p:txBody>
+          <a:bodyPr wrap="square" lIns="36576" rIns="36576" tIns="0" bIns="0">
+            <a:spAutoFit/>
+          </a:bodyPr>
+          <a:lstStyle/>
+          <a:p>
+            <a:r>
+              <a:rPr sz="1350" b="1">
+                <a:solidFill>
+                  <a:srgbClr val="1F77B4"/>
+                </a:solidFill>
+                <a:latin typeface="Calibri"/>
+              </a:rPr>
+              <a:t>What ② depicts:  </a:t>
+            </a:r>
+            <a:r>
+              <a:rPr sz="1350">
+                <a:solidFill>
+                  <a:srgbClr val="000000"/>
+                </a:solidFill>
+                <a:latin typeface="Calibri"/>
+              </a:rPr>
+              <a:t>the elastic response of a specimen that has ALREADY been permanently stretched by 0.2 %.</a:t>
+            </a:r>
+          </a:p>
+        </p:txBody>
+      </p:sp>
+      <p:sp>
+        <p:nvSpPr>
+          <p:cNvPr id="8" name="TextBox 7"/>
+          <p:cNvSpPr txBox="1"/>
+          <p:nvPr/>
+        </p:nvSpPr>
+        <p:spPr>
+          <a:xfrm>
+            <a:off x="7452360" y="2432304"/>
+            <a:ext cx="4343400" cy="685800"/>
+          </a:xfrm>
+          <a:prstGeom prst="rect">
+            <a:avLst/>
+          </a:prstGeom>
+          <a:noFill/>
+        </p:spPr>
+        <p:txBody>
+          <a:bodyPr wrap="square" lIns="36576" rIns="36576" tIns="0" bIns="0">
+            <a:spAutoFit/>
+          </a:bodyPr>
+          <a:lstStyle/>
+          <a:p>
+            <a:r>
+              <a:rPr sz="1350" b="1">
+                <a:solidFill>
+                  <a:srgbClr val="1F77B4"/>
+                </a:solidFill>
+                <a:latin typeface="Calibri"/>
+              </a:rPr>
+              <a:t>Why sideways:  </a:t>
+            </a:r>
+            <a:r>
+              <a:rPr sz="1350">
+                <a:solidFill>
+                  <a:srgbClr val="000000"/>
+                </a:solidFill>
+                <a:latin typeface="Calibri"/>
+              </a:rPr>
+              <a:t>at any stress, the horizontal distance from the elastic line to the curve is the stretch that will NOT spring back when you unload.</a:t>
+            </a:r>
+          </a:p>
+        </p:txBody>
+      </p:sp>
+      <p:sp>
+        <p:nvSpPr>
+          <p:cNvPr id="9" name="TextBox 8"/>
+          <p:cNvSpPr txBox="1"/>
+          <p:nvPr/>
+        </p:nvSpPr>
+        <p:spPr>
+          <a:xfrm>
+            <a:off x="7452360" y="3401568"/>
+            <a:ext cx="4343400" cy="685800"/>
+          </a:xfrm>
+          <a:prstGeom prst="rect">
+            <a:avLst/>
+          </a:prstGeom>
+          <a:noFill/>
+        </p:spPr>
+        <p:txBody>
+          <a:bodyPr wrap="square" lIns="36576" rIns="36576" tIns="0" bIns="0">
+            <a:spAutoFit/>
+          </a:bodyPr>
+          <a:lstStyle/>
+          <a:p>
+            <a:r>
+              <a:rPr sz="1350" b="1">
+                <a:solidFill>
+                  <a:srgbClr val="1F77B4"/>
+                </a:solidFill>
+                <a:latin typeface="Calibri"/>
+              </a:rPr>
+              <a:t>So σ_y is:  </a:t>
+            </a:r>
+            <a:r>
+              <a:rPr sz="1350">
+                <a:solidFill>
+                  <a:srgbClr val="000000"/>
+                </a:solidFill>
+                <a:latin typeface="Calibri"/>
+              </a:rPr>
+              <a:t>the stress at which that permanent stretch first reaches 0.2 %. That is where ② meets the curve.</a:t>
+            </a:r>
+          </a:p>
+        </p:txBody>
+      </p:sp>
+      <p:sp>
+        <p:nvSpPr>
+          <p:cNvPr id="10" name="Rounded Rectangle 9"/>
+          <p:cNvSpPr/>
+          <p:nvPr/>
+        </p:nvSpPr>
+        <p:spPr>
+          <a:xfrm>
+            <a:off x="7452360" y="4315968"/>
+            <a:ext cx="4343400" cy="841248"/>
+          </a:xfrm>
+          <a:prstGeom prst="roundRect">
+            <a:avLst/>
+          </a:prstGeom>
+          <a:solidFill>
+            <a:srgbClr val="F4F6F8"/>
+          </a:solidFill>
+          <a:ln w="13970">
+            <a:solidFill>
+              <a:srgbClr val="B8C2CC"/>
+            </a:solidFill>
+          </a:ln>
+        </p:spPr>
+        <p:style>
+          <a:lnRef idx="1">
+            <a:schemeClr val="accent1"/>
+          </a:lnRef>
+          <a:fillRef idx="3">
+            <a:schemeClr val="accent1"/>
+          </a:fillRef>
+          <a:effectRef idx="2">
+            <a:schemeClr val="accent1"/>
+          </a:effectRef>
+          <a:fontRef idx="minor">
+            <a:schemeClr val="lt1"/>
+          </a:fontRef>
+        </p:style>
+        <p:txBody>
+          <a:bodyPr rtlCol="0" anchor="t" wrap="none" lIns="128016" rIns="73152" tIns="82296" bIns="54864"/>
+          <a:lstStyle/>
+          <a:p>
+            <a:pPr algn="l"/>
+            <a:r>
+              <a:rPr sz="1150" b="0">
+                <a:solidFill>
+                  <a:srgbClr val="000000"/>
+                </a:solidFill>
+                <a:latin typeface="Consolas"/>
+              </a:rPr>
+              <a:t>elastic line reaches 44.7 MPa at  1.46 %</a:t>
+            </a:r>
+          </a:p>
+          <a:p>
+            <a:pPr algn="l"/>
+            <a:r>
+              <a:rPr sz="1150" b="0">
+                <a:solidFill>
+                  <a:srgbClr val="000000"/>
+                </a:solidFill>
+                <a:latin typeface="Consolas"/>
+              </a:rPr>
+              <a:t>the CURVE reaches    44.7 MPa at  1.67 %</a:t>
+            </a:r>
+          </a:p>
+          <a:p>
+            <a:pPr algn="l"/>
+            <a:r>
+              <a:rPr sz="1150" b="1">
+                <a:solidFill>
+                  <a:srgbClr val="D62728"/>
+                </a:solidFill>
+                <a:latin typeface="Consolas"/>
+              </a:rPr>
+              <a:t>                       difference   0.21 %  ✓</a:t>
+            </a:r>
+          </a:p>
+        </p:txBody>
+      </p:sp>
+      <p:sp>
+        <p:nvSpPr>
+          <p:cNvPr id="11" name="TextBox 10"/>
+          <p:cNvSpPr txBox="1"/>
+          <p:nvPr/>
+        </p:nvSpPr>
+        <p:spPr>
+          <a:xfrm>
+            <a:off x="7452360" y="5303520"/>
+            <a:ext cx="4343400" cy="566928"/>
+          </a:xfrm>
+          <a:prstGeom prst="rect">
+            <a:avLst/>
+          </a:prstGeom>
+          <a:noFill/>
+        </p:spPr>
+        <p:txBody>
+          <a:bodyPr wrap="square" lIns="45720" rIns="45720" tIns="18288" bIns="18288" anchor="t">
+            <a:spAutoFit/>
+          </a:bodyPr>
+          <a:lstStyle/>
+          <a:p>
+            <a:pPr algn="l"/>
+            <a:r>
+              <a:rPr sz="1250" b="0" i="0">
+                <a:solidFill>
+                  <a:srgbClr val="707070"/>
+                </a:solidFill>
+                <a:latin typeface="Calibri"/>
+              </a:rPr>
+              <a:t>Without this convention there is no yield number at all — the curve never gives you one.</a:t>
+            </a:r>
+          </a:p>
+        </p:txBody>
+      </p:sp>
+      <p:sp>
+        <p:nvSpPr>
+          <p:cNvPr id="12" name="Rectangle 11"/>
+          <p:cNvSpPr/>
+          <p:nvPr/>
+        </p:nvSpPr>
+        <p:spPr>
+          <a:xfrm>
+            <a:off x="457200" y="5989320"/>
+            <a:ext cx="11292840" cy="384048"/>
+          </a:xfrm>
+          <a:prstGeom prst="rect">
+            <a:avLst/>
+          </a:prstGeom>
+          <a:solidFill>
+            <a:srgbClr val="E7F1F8"/>
+          </a:solidFill>
+          <a:ln>
+            <a:noFill/>
+          </a:ln>
+        </p:spPr>
+        <p:style>
+          <a:lnRef idx="1">
+            <a:schemeClr val="accent1"/>
+          </a:lnRef>
+          <a:fillRef idx="3">
+            <a:schemeClr val="accent1"/>
+          </a:fillRef>
+          <a:effectRef idx="2">
+            <a:schemeClr val="accent1"/>
+          </a:effectRef>
+          <a:fontRef idx="minor">
+            <a:schemeClr val="lt1"/>
+          </a:fontRef>
+        </p:style>
+        <p:txBody>
+          <a:bodyPr rtlCol="0" anchor="ctr" wrap="square" lIns="109728" rIns="109728"/>
+          <a:lstStyle/>
+          <a:p>
+            <a:pPr algn="ctr"/>
+            <a:r>
+              <a:rPr sz="1300" b="1">
+                <a:solidFill>
+                  <a:srgbClr val="1F3F2F"/>
+                </a:solidFill>
+                <a:latin typeface="Calibri"/>
+              </a:rPr>
+              <a:t>σ_y is a DEFINITION, not a feature of the graph.  0.2 % is the agreed convention (ISO 527, ASTM E8).</a:t>
+            </a:r>
+          </a:p>
+        </p:txBody>
+      </p:sp>
+      <p:sp>
+        <p:nvSpPr>
+          <p:cNvPr id="13" name="TextBox 12"/>
+          <p:cNvSpPr txBox="1"/>
+          <p:nvPr/>
+        </p:nvSpPr>
+        <p:spPr>
+          <a:xfrm>
+            <a:off x="548640" y="6400800"/>
+            <a:ext cx="10744200" cy="365760"/>
+          </a:xfrm>
+          <a:prstGeom prst="rect">
+            <a:avLst/>
+          </a:prstGeom>
+          <a:noFill/>
+        </p:spPr>
+        <p:txBody>
+          <a:bodyPr wrap="square" lIns="45720" rIns="45720" tIns="18288" bIns="18288" anchor="t">
+            <a:spAutoFit/>
+          </a:bodyPr>
+          <a:lstStyle/>
+          <a:p>
+            <a:pPr algn="l"/>
+            <a:r>
+              <a:rPr sz="1200" b="0" i="1">
+                <a:solidFill>
+                  <a:srgbClr val="707070"/>
+                </a:solidFill>
+                <a:latin typeface="Calibri"/>
+              </a:rPr>
+              <a:t>V6d · S11 — σ_y 44.7 MPa @ 1.67 % · the 0.2 % gap is exact by construction</a:t>
+            </a:r>
+          </a:p>
+        </p:txBody>
+      </p:sp>
+      <p:sp>
+        <p:nvSpPr>
+          <p:cNvPr id="14" name="TextBox 13"/>
+          <p:cNvSpPr txBox="1"/>
+          <p:nvPr/>
+        </p:nvSpPr>
+        <p:spPr>
+          <a:xfrm>
+            <a:off x="11384280" y="6446520"/>
+            <a:ext cx="548640" cy="274320"/>
+          </a:xfrm>
+          <a:prstGeom prst="rect">
+            <a:avLst/>
+          </a:prstGeom>
+          <a:noFill/>
+        </p:spPr>
+        <p:txBody>
+          <a:bodyPr wrap="square" lIns="45720" rIns="45720" tIns="18288" bIns="18288" anchor="t">
+            <a:spAutoFit/>
+          </a:bodyPr>
+          <a:lstStyle/>
+          <a:p>
+            <a:pPr algn="r"/>
+            <a:r>
+              <a:rPr sz="1000" b="0" i="0">
+                <a:solidFill>
+                  <a:srgbClr val="707070"/>
+                </a:solidFill>
+                <a:latin typeface="Calibri"/>
+              </a:rPr>
+              <a:t>4</a:t>
+            </a:r>
+          </a:p>
+        </p:txBody>
+      </p:sp>
+    </p:spTree>
+  </p:cSld>
+  <p:clrMapOvr>
+    <a:masterClrMapping/>
+  </p:clrMapOvr>
+</p:sld>
+</file>
+
+<file path=ppt/slides/slide5.xml><?xml version="1.0" encoding="utf-8"?>
+<p:sld xmlns:a="http://schemas.openxmlformats.org/drawingml/2006/main" xmlns:p="http://schemas.openxmlformats.org/presentationml/2006/main" xmlns:r="http://schemas.openxmlformats.org/officeDocument/2006/relationships">
+  <p:cSld>
+    <p:spTree>
+      <p:nvGrpSpPr>
+        <p:cNvPr id="1" name=""/>
+        <p:cNvGrpSpPr/>
+        <p:nvPr/>
+      </p:nvGrpSpPr>
+      <p:grpSpPr/>
+      <p:sp>
+        <p:nvSpPr>
+          <p:cNvPr id="2" name="TextBox 1"/>
+          <p:cNvSpPr txBox="1"/>
+          <p:nvPr/>
+        </p:nvSpPr>
+        <p:spPr>
+          <a:xfrm>
+            <a:off x="11155680" y="274320"/>
+            <a:ext cx="914400" cy="274320"/>
+          </a:xfrm>
+          <a:prstGeom prst="rect">
+            <a:avLst/>
+          </a:prstGeom>
+          <a:noFill/>
+        </p:spPr>
+        <p:txBody>
+          <a:bodyPr wrap="square" lIns="45720" rIns="45720" tIns="18288" bIns="18288" anchor="t">
+            <a:spAutoFit/>
+          </a:bodyPr>
+          <a:lstStyle/>
+          <a:p>
+            <a:pPr algn="r"/>
+            <a:r>
+              <a:rPr sz="800" b="1" i="0">
+                <a:solidFill>
+                  <a:srgbClr val="707070"/>
+                </a:solidFill>
+                <a:latin typeface="Calibri"/>
+              </a:rPr>
+              <a:t>JÖNKÖPING UNIVERSITY</a:t>
+            </a:r>
+          </a:p>
+        </p:txBody>
+      </p:sp>
+      <p:sp>
+        <p:nvSpPr>
+          <p:cNvPr id="3" name="Rectangle 2"/>
+          <p:cNvSpPr/>
+          <p:nvPr/>
+        </p:nvSpPr>
+        <p:spPr>
+          <a:xfrm>
+            <a:off x="457200" y="411480"/>
+            <a:ext cx="457200" cy="73152"/>
+          </a:xfrm>
+          <a:prstGeom prst="rect">
+            <a:avLst/>
+          </a:prstGeom>
+          <a:solidFill>
+            <a:srgbClr val="A9D6EF"/>
+          </a:solidFill>
+          <a:ln>
+            <a:noFill/>
+          </a:ln>
+        </p:spPr>
+        <p:style>
+          <a:lnRef idx="1">
+            <a:schemeClr val="accent1"/>
+          </a:lnRef>
+          <a:fillRef idx="3">
+            <a:schemeClr val="accent1"/>
+          </a:fillRef>
+          <a:effectRef idx="2">
+            <a:schemeClr val="accent1"/>
+          </a:effectRef>
+          <a:fontRef idx="minor">
+            <a:schemeClr val="lt1"/>
+          </a:fontRef>
+        </p:style>
+        <p:txBody>
+          <a:bodyPr rtlCol="0" anchor="ctr"/>
+          <a:lstStyle/>
+          <a:p>
+            <a:pPr algn="ctr"/>
+          </a:p>
+        </p:txBody>
+      </p:sp>
+      <p:sp>
+        <p:nvSpPr>
+          <p:cNvPr id="4" name="TextBox 3"/>
+          <p:cNvSpPr txBox="1"/>
+          <p:nvPr/>
+        </p:nvSpPr>
+        <p:spPr>
+          <a:xfrm>
+            <a:off x="457200" y="502920"/>
+            <a:ext cx="11430000" cy="822960"/>
+          </a:xfrm>
+          <a:prstGeom prst="rect">
+            <a:avLst/>
+          </a:prstGeom>
+          <a:noFill/>
+        </p:spPr>
+        <p:txBody>
+          <a:bodyPr wrap="square" lIns="45720" rIns="45720" tIns="18288" bIns="18288" anchor="t">
+            <a:spAutoFit/>
+          </a:bodyPr>
+          <a:lstStyle/>
+          <a:p>
+            <a:pPr algn="l"/>
+            <a:r>
+              <a:rPr sz="3000" b="0" i="0">
+                <a:solidFill>
+                  <a:srgbClr val="000000"/>
+                </a:solidFill>
+                <a:latin typeface="Calibri Light"/>
+              </a:rPr>
+              <a:t>Why the fit stops at 0.40 %  —  and what that costs us</a:t>
+            </a:r>
+          </a:p>
+        </p:txBody>
+      </p:sp>
+      <p:sp>
+        <p:nvSpPr>
+          <p:cNvPr id="5" name="TextBox 4"/>
+          <p:cNvSpPr txBox="1"/>
+          <p:nvPr/>
+        </p:nvSpPr>
+        <p:spPr>
+          <a:xfrm>
+            <a:off x="457200" y="1207008"/>
+            <a:ext cx="11338560" cy="365760"/>
+          </a:xfrm>
+          <a:prstGeom prst="rect">
+            <a:avLst/>
+          </a:prstGeom>
+          <a:noFill/>
+        </p:spPr>
+        <p:txBody>
+          <a:bodyPr wrap="square" lIns="45720" rIns="45720" tIns="18288" bIns="18288" anchor="t">
+            <a:spAutoFit/>
+          </a:bodyPr>
+          <a:lstStyle/>
+          <a:p>
+            <a:pPr algn="l"/>
+            <a:r>
+              <a:rPr sz="1600" b="0" i="0">
+                <a:solidFill>
+                  <a:srgbClr val="707070"/>
+                </a:solidFill>
+                <a:latin typeface="Calibri"/>
+              </a:rPr>
+              <a:t>Past the elastic region the curve is no longer straight, so a slope measured there would not be a modulus at all.</a:t>
+            </a:r>
+          </a:p>
+        </p:txBody>
+      </p:sp>
+      <p:pic>
+        <p:nvPicPr>
+          <p:cNvPr id="6" name="Picture 5" descr="e_fig_bands.png"/>
+          <p:cNvPicPr>
+            <a:picLocks noChangeAspect="1"/>
+          </p:cNvPicPr>
+          <p:nvPr/>
+        </p:nvPicPr>
+        <p:blipFill>
+          <a:blip r:embed="rId2"/>
+          <a:stretch>
+            <a:fillRect/>
+          </a:stretch>
+        </p:blipFill>
+        <p:spPr>
+          <a:xfrm>
+            <a:off x="320040" y="1627632"/>
+            <a:ext cx="6903720" cy="3904599"/>
+          </a:xfrm>
+          <a:prstGeom prst="rect">
+            <a:avLst/>
+          </a:prstGeom>
+        </p:spPr>
+      </p:pic>
+      <p:sp>
+        <p:nvSpPr>
+          <p:cNvPr id="7" name="TextBox 6"/>
+          <p:cNvSpPr txBox="1"/>
+          <p:nvPr/>
+        </p:nvSpPr>
+        <p:spPr>
+          <a:xfrm>
+            <a:off x="7452360" y="1645920"/>
+            <a:ext cx="4343400" cy="685800"/>
+          </a:xfrm>
+          <a:prstGeom prst="rect">
+            <a:avLst/>
+          </a:prstGeom>
+          <a:noFill/>
+        </p:spPr>
+        <p:txBody>
+          <a:bodyPr wrap="square" lIns="36576" rIns="36576" tIns="0" bIns="0">
+            <a:spAutoFit/>
+          </a:bodyPr>
+          <a:lstStyle/>
+          <a:p>
+            <a:r>
+              <a:rPr sz="1350" b="1">
+                <a:solidFill>
+                  <a:srgbClr val="1F77B4"/>
+                </a:solidFill>
+                <a:latin typeface="Calibri"/>
+              </a:rPr>
+              <a:t>Why not further?  </a:t>
+            </a:r>
+            <a:r>
+              <a:rPr sz="1350">
+                <a:solidFill>
+                  <a:srgbClr val="000000"/>
+                </a:solidFill>
+                <a:latin typeface="Calibri"/>
+              </a:rPr>
+              <a:t>beyond ~1.2 % the material is yielding. Its slope collapses (2.62 → 2.07 → 1.22 GPa). Including that would average elastic and plastic behaviour together.</a:t>
+            </a:r>
+          </a:p>
+        </p:txBody>
+      </p:sp>
+      <p:sp>
+        <p:nvSpPr>
+          <p:cNvPr id="8" name="TextBox 7"/>
+          <p:cNvSpPr txBox="1"/>
+          <p:nvPr/>
+        </p:nvSpPr>
+        <p:spPr>
+          <a:xfrm>
+            <a:off x="7452360" y="2798064"/>
+            <a:ext cx="4343400" cy="685800"/>
+          </a:xfrm>
+          <a:prstGeom prst="rect">
+            <a:avLst/>
+          </a:prstGeom>
+          <a:noFill/>
+        </p:spPr>
+        <p:txBody>
+          <a:bodyPr wrap="square" lIns="36576" rIns="36576" tIns="0" bIns="0">
+            <a:spAutoFit/>
+          </a:bodyPr>
+          <a:lstStyle/>
+          <a:p>
+            <a:r>
+              <a:rPr sz="1350" b="1">
+                <a:solidFill>
+                  <a:srgbClr val="1F77B4"/>
+                </a:solidFill>
+                <a:latin typeface="Calibri"/>
+              </a:rPr>
+              <a:t>Why not from 0 %?  </a:t>
+            </a:r>
+            <a:r>
+              <a:rPr sz="1350">
+                <a:solidFill>
+                  <a:srgbClr val="000000"/>
+                </a:solidFill>
+                <a:latin typeface="Calibri"/>
+              </a:rPr>
+              <a:t>the first fraction of a percent is grip take-up and specimen settling, not material response — the noisiest part of the whole test.</a:t>
+            </a:r>
+          </a:p>
+        </p:txBody>
+      </p:sp>
+      <p:sp>
+        <p:nvSpPr>
+          <p:cNvPr id="9" name="TextBox 8"/>
+          <p:cNvSpPr txBox="1"/>
+          <p:nvPr/>
+        </p:nvSpPr>
+        <p:spPr>
+          <a:xfrm>
+            <a:off x="7452360" y="3785615"/>
+            <a:ext cx="4343400" cy="685800"/>
+          </a:xfrm>
+          <a:prstGeom prst="rect">
+            <a:avLst/>
+          </a:prstGeom>
+          <a:noFill/>
+        </p:spPr>
+        <p:txBody>
+          <a:bodyPr wrap="square" lIns="36576" rIns="36576" tIns="0" bIns="0">
+            <a:spAutoFit/>
+          </a:bodyPr>
+          <a:lstStyle/>
+          <a:p>
+            <a:r>
+              <a:rPr sz="1350" b="1">
+                <a:solidFill>
+                  <a:srgbClr val="1F77B4"/>
+                </a:solidFill>
+                <a:latin typeface="Calibri"/>
+              </a:rPr>
+              <a:t>0.05–0.40 % is the convention  </a:t>
+            </a:r>
+            <a:r>
+              <a:rPr sz="1350">
+                <a:solidFill>
+                  <a:srgbClr val="000000"/>
+                </a:solidFill>
+                <a:latin typeface="Calibri"/>
+              </a:rPr>
+              <a:t>(ISO 527 uses 0.05–0.25 %). It is chosen to sit safely inside the elastic region.</a:t>
+            </a:r>
+          </a:p>
+        </p:txBody>
+      </p:sp>
+      <p:sp>
+        <p:nvSpPr>
+          <p:cNvPr id="10" name="Rectangle 9"/>
+          <p:cNvSpPr/>
+          <p:nvPr/>
+        </p:nvSpPr>
+        <p:spPr>
+          <a:xfrm>
+            <a:off x="7452360" y="4617720"/>
+            <a:ext cx="4343400" cy="1207008"/>
+          </a:xfrm>
+          <a:prstGeom prst="rect">
+            <a:avLst/>
+          </a:prstGeom>
+          <a:solidFill>
+            <a:srgbClr val="FFF3CD"/>
+          </a:solidFill>
+          <a:ln>
+            <a:noFill/>
+          </a:ln>
+        </p:spPr>
+        <p:style>
+          <a:lnRef idx="1">
+            <a:schemeClr val="accent1"/>
+          </a:lnRef>
+          <a:fillRef idx="3">
+            <a:schemeClr val="accent1"/>
+          </a:fillRef>
+          <a:effectRef idx="2">
+            <a:schemeClr val="accent1"/>
+          </a:effectRef>
+          <a:fontRef idx="minor">
+            <a:schemeClr val="lt1"/>
+          </a:fontRef>
+        </p:style>
+        <p:txBody>
+          <a:bodyPr rtlCol="0" anchor="ctr" wrap="square" lIns="109728" rIns="109728"/>
+          <a:lstStyle/>
+          <a:p>
+            <a:pPr algn="ctr"/>
+            <a:r>
+              <a:rPr sz="1150" b="1">
+                <a:solidFill>
+                  <a:srgbClr val="1F3F2F"/>
+                </a:solidFill>
+                <a:latin typeface="Calibri"/>
+              </a:rPr>
+              <a:t>BUT on S16 that window lands on the toe, not the elastic region:
+it reads 1.62–2.11 GPa, where the straightest part of the
+curve (0.6–1.2 %, R² ≥ 0.997) reads 2.57–2.62 GPa.
+Reported E = 1.88 GPa is therefore an UNDER-estimate.</a:t>
+            </a:r>
+          </a:p>
+        </p:txBody>
+      </p:sp>
+      <p:sp>
+        <p:nvSpPr>
+          <p:cNvPr id="11" name="Rectangle 10"/>
+          <p:cNvSpPr/>
+          <p:nvPr/>
+        </p:nvSpPr>
+        <p:spPr>
+          <a:xfrm>
+            <a:off x="457200" y="5989320"/>
+            <a:ext cx="11292840" cy="384048"/>
+          </a:xfrm>
+          <a:prstGeom prst="rect">
+            <a:avLst/>
+          </a:prstGeom>
+          <a:solidFill>
+            <a:srgbClr val="FFE8D6"/>
+          </a:solidFill>
+          <a:ln>
+            <a:noFill/>
+          </a:ln>
+        </p:spPr>
+        <p:style>
+          <a:lnRef idx="1">
+            <a:schemeClr val="accent1"/>
+          </a:lnRef>
+          <a:fillRef idx="3">
+            <a:schemeClr val="accent1"/>
+          </a:fillRef>
+          <a:effectRef idx="2">
+            <a:schemeClr val="accent1"/>
+          </a:effectRef>
+          <a:fontRef idx="minor">
+            <a:schemeClr val="lt1"/>
+          </a:fontRef>
+        </p:style>
+        <p:txBody>
+          <a:bodyPr rtlCol="0" anchor="ctr" wrap="square" lIns="109728" rIns="109728"/>
+          <a:lstStyle/>
+          <a:p>
+            <a:pPr algn="ctr"/>
+            <a:r>
+              <a:rPr sz="1250" b="1">
+                <a:solidFill>
+                  <a:srgbClr val="1F3F2F"/>
+                </a:solidFill>
+                <a:latin typeface="Calibri"/>
+              </a:rPr>
+              <a:t>Open question for the campaign: move the window to 0.25–0.60 %, or keep ISO comparability? It changes every published E.</a:t>
+            </a:r>
+          </a:p>
+        </p:txBody>
+      </p:sp>
+      <p:sp>
+        <p:nvSpPr>
+          <p:cNvPr id="12" name="TextBox 11"/>
+          <p:cNvSpPr txBox="1"/>
+          <p:nvPr/>
+        </p:nvSpPr>
+        <p:spPr>
+          <a:xfrm>
+            <a:off x="548640" y="6400800"/>
+            <a:ext cx="10744200" cy="365760"/>
+          </a:xfrm>
+          <a:prstGeom prst="rect">
+            <a:avLst/>
+          </a:prstGeom>
+          <a:noFill/>
+        </p:spPr>
+        <p:txBody>
+          <a:bodyPr wrap="square" lIns="45720" rIns="45720" tIns="18288" bIns="18288" anchor="t">
+            <a:spAutoFit/>
+          </a:bodyPr>
+          <a:lstStyle/>
+          <a:p>
+            <a:pPr algn="l"/>
+            <a:r>
+              <a:rPr sz="1200" b="0" i="1">
+                <a:solidFill>
+                  <a:srgbClr val="707070"/>
+                </a:solidFill>
+                <a:latin typeface="Calibri"/>
+              </a:rPr>
+              <a:t>S16 · local slope fitted in each band separately · R² printed inside each bar</a:t>
+            </a:r>
+          </a:p>
+        </p:txBody>
+      </p:sp>
+      <p:sp>
+        <p:nvSpPr>
+          <p:cNvPr id="13" name="TextBox 12"/>
+          <p:cNvSpPr txBox="1"/>
+          <p:nvPr/>
+        </p:nvSpPr>
+        <p:spPr>
+          <a:xfrm>
+            <a:off x="11384280" y="6446520"/>
+            <a:ext cx="548640" cy="274320"/>
+          </a:xfrm>
+          <a:prstGeom prst="rect">
+            <a:avLst/>
+          </a:prstGeom>
+          <a:noFill/>
+        </p:spPr>
+        <p:txBody>
+          <a:bodyPr wrap="square" lIns="45720" rIns="45720" tIns="18288" bIns="18288" anchor="t">
+            <a:spAutoFit/>
+          </a:bodyPr>
+          <a:lstStyle/>
+          <a:p>
+            <a:pPr algn="r"/>
+            <a:r>
+              <a:rPr sz="1000" b="0" i="0">
+                <a:solidFill>
+                  <a:srgbClr val="707070"/>
+                </a:solidFill>
+                <a:latin typeface="Calibri"/>
+              </a:rPr>
+              <a:t>5</a:t>
             </a:r>
           </a:p>
         </p:txBody>
